--- a/presentation/pitch_hse_ivo_2026.pptx
+++ b/presentation/pitch_hse_ivo_2026.pptx
@@ -304,7 +304,7 @@
           <a:p>
             <a:fld id="{73261BF4-8B2C-784B-9959-B59A059012C3}" type="datetimeFigureOut">
               <a:rPr lang="en-RU" smtClean="0"/>
-              <a:t>10/19/2026</a:t>
+              <a:t>10/27/2026</a:t>
             </a:fld>
             <a:endParaRPr lang="en-RU"/>
           </a:p>
@@ -900,6 +900,14 @@
   <p:clrMapOvr>
     <a:masterClrMapping/>
   </p:clrMapOvr>
+  <mc:AlternateContent xmlns:mc="http://schemas.openxmlformats.org/markup-compatibility/2006">
+    <mc:Choice xmlns:p14="http://schemas.microsoft.com/office/powerpoint/2010/main" Requires="p14">
+      <p:transition p14:dur="10" advClick="0" advTm="30000"/>
+    </mc:Choice>
+    <mc:Fallback>
+      <p:transition advClick="0" advTm="30000"/>
+    </mc:Fallback>
+  </mc:AlternateContent>
   <p:extLst>
     <p:ext uri="{DCECCB84-F9BA-43D5-87BE-67443E8EF086}">
       <p15:sldGuideLst xmlns:p15="http://schemas.microsoft.com/office/powerpoint/2012/main"/>
@@ -2810,6 +2818,14 @@
   <p:clrMapOvr>
     <a:masterClrMapping/>
   </p:clrMapOvr>
+  <mc:AlternateContent xmlns:mc="http://schemas.openxmlformats.org/markup-compatibility/2006">
+    <mc:Choice xmlns:p14="http://schemas.microsoft.com/office/powerpoint/2010/main" Requires="p14">
+      <p:transition p14:dur="10" advClick="0" advTm="30000"/>
+    </mc:Choice>
+    <mc:Fallback>
+      <p:transition advClick="0" advTm="30000"/>
+    </mc:Fallback>
+  </mc:AlternateContent>
 </p:sldLayout>
 </file>
 
@@ -3433,6 +3449,14 @@
   <p:clrMapOvr>
     <a:masterClrMapping/>
   </p:clrMapOvr>
+  <mc:AlternateContent xmlns:mc="http://schemas.openxmlformats.org/markup-compatibility/2006">
+    <mc:Choice xmlns:p14="http://schemas.microsoft.com/office/powerpoint/2010/main" Requires="p14">
+      <p:transition p14:dur="10" advClick="0" advTm="30000"/>
+    </mc:Choice>
+    <mc:Fallback>
+      <p:transition advClick="0" advTm="30000"/>
+    </mc:Fallback>
+  </mc:AlternateContent>
 </p:sldLayout>
 </file>
 
@@ -3553,6 +3577,14 @@
   <p:clrMapOvr>
     <a:masterClrMapping/>
   </p:clrMapOvr>
+  <mc:AlternateContent xmlns:mc="http://schemas.openxmlformats.org/markup-compatibility/2006">
+    <mc:Choice xmlns:p14="http://schemas.microsoft.com/office/powerpoint/2010/main" Requires="p14">
+      <p:transition p14:dur="10" advClick="0" advTm="30000"/>
+    </mc:Choice>
+    <mc:Fallback>
+      <p:transition advClick="0" advTm="30000"/>
+    </mc:Fallback>
+  </mc:AlternateContent>
 </p:sldLayout>
 </file>
 
@@ -4188,6 +4220,14 @@
   <p:clrMapOvr>
     <a:masterClrMapping/>
   </p:clrMapOvr>
+  <mc:AlternateContent xmlns:mc="http://schemas.openxmlformats.org/markup-compatibility/2006">
+    <mc:Choice xmlns:p14="http://schemas.microsoft.com/office/powerpoint/2010/main" Requires="p14">
+      <p:transition p14:dur="10" advClick="0" advTm="30000"/>
+    </mc:Choice>
+    <mc:Fallback>
+      <p:transition advClick="0" advTm="30000"/>
+    </mc:Fallback>
+  </mc:AlternateContent>
 </p:sldLayout>
 </file>
 
@@ -5035,6 +5075,14 @@
   <p:clrMapOvr>
     <a:masterClrMapping/>
   </p:clrMapOvr>
+  <mc:AlternateContent xmlns:mc="http://schemas.openxmlformats.org/markup-compatibility/2006">
+    <mc:Choice xmlns:p14="http://schemas.microsoft.com/office/powerpoint/2010/main" Requires="p14">
+      <p:transition p14:dur="10" advClick="0" advTm="30000"/>
+    </mc:Choice>
+    <mc:Fallback>
+      <p:transition advClick="0" advTm="30000"/>
+    </mc:Fallback>
+  </mc:AlternateContent>
 </p:sldLayout>
 </file>
 
@@ -6107,6 +6155,14 @@
   <p:clrMapOvr>
     <a:masterClrMapping/>
   </p:clrMapOvr>
+  <mc:AlternateContent xmlns:mc="http://schemas.openxmlformats.org/markup-compatibility/2006">
+    <mc:Choice xmlns:p14="http://schemas.microsoft.com/office/powerpoint/2010/main" Requires="p14">
+      <p:transition p14:dur="10" advClick="0" advTm="30000"/>
+    </mc:Choice>
+    <mc:Fallback>
+      <p:transition advClick="0" advTm="30000"/>
+    </mc:Fallback>
+  </mc:AlternateContent>
 </p:sldLayout>
 </file>
 
@@ -7663,6 +7719,14 @@
   <p:clrMapOvr>
     <a:masterClrMapping/>
   </p:clrMapOvr>
+  <mc:AlternateContent xmlns:mc="http://schemas.openxmlformats.org/markup-compatibility/2006">
+    <mc:Choice xmlns:p14="http://schemas.microsoft.com/office/powerpoint/2010/main" Requires="p14">
+      <p:transition p14:dur="10" advClick="0" advTm="30000"/>
+    </mc:Choice>
+    <mc:Fallback>
+      <p:transition advClick="0" advTm="30000"/>
+    </mc:Fallback>
+  </mc:AlternateContent>
 </p:sldLayout>
 </file>
 
@@ -9246,6 +9310,14 @@
   <p:clrMapOvr>
     <a:masterClrMapping/>
   </p:clrMapOvr>
+  <mc:AlternateContent xmlns:mc="http://schemas.openxmlformats.org/markup-compatibility/2006">
+    <mc:Choice xmlns:p14="http://schemas.microsoft.com/office/powerpoint/2010/main" Requires="p14">
+      <p:transition p14:dur="10" advClick="0" advTm="30000"/>
+    </mc:Choice>
+    <mc:Fallback>
+      <p:transition advClick="0" advTm="30000"/>
+    </mc:Fallback>
+  </mc:AlternateContent>
 </p:sldLayout>
 </file>
 
@@ -10551,6 +10623,14 @@
   <p:clrMapOvr>
     <a:masterClrMapping/>
   </p:clrMapOvr>
+  <mc:AlternateContent xmlns:mc="http://schemas.openxmlformats.org/markup-compatibility/2006">
+    <mc:Choice xmlns:p14="http://schemas.microsoft.com/office/powerpoint/2010/main" Requires="p14">
+      <p:transition p14:dur="10" advClick="0" advTm="30000"/>
+    </mc:Choice>
+    <mc:Fallback>
+      <p:transition advClick="0" advTm="30000"/>
+    </mc:Fallback>
+  </mc:AlternateContent>
 </p:sldLayout>
 </file>
 
@@ -11461,6 +11541,14 @@
   <p:clrMapOvr>
     <a:masterClrMapping/>
   </p:clrMapOvr>
+  <mc:AlternateContent xmlns:mc="http://schemas.openxmlformats.org/markup-compatibility/2006">
+    <mc:Choice xmlns:p14="http://schemas.microsoft.com/office/powerpoint/2010/main" Requires="p14">
+      <p:transition p14:dur="10" advClick="0" advTm="30000"/>
+    </mc:Choice>
+    <mc:Fallback>
+      <p:transition advClick="0" advTm="30000"/>
+    </mc:Fallback>
+  </mc:AlternateContent>
 </p:sldLayout>
 </file>
 
@@ -13053,6 +13141,14 @@
   <p:clrMapOvr>
     <a:masterClrMapping/>
   </p:clrMapOvr>
+  <mc:AlternateContent xmlns:mc="http://schemas.openxmlformats.org/markup-compatibility/2006">
+    <mc:Choice xmlns:p14="http://schemas.microsoft.com/office/powerpoint/2010/main" Requires="p14">
+      <p:transition p14:dur="10" advClick="0" advTm="30000"/>
+    </mc:Choice>
+    <mc:Fallback>
+      <p:transition advClick="0" advTm="30000"/>
+    </mc:Fallback>
+  </mc:AlternateContent>
 </p:sldLayout>
 </file>
 
@@ -13100,6 +13196,14 @@
     <p:sldLayoutId id="2147483657" r:id="rId11"/>
     <p:sldLayoutId id="2147483659" r:id="rId12"/>
   </p:sldLayoutIdLst>
+  <mc:AlternateContent xmlns:mc="http://schemas.openxmlformats.org/markup-compatibility/2006">
+    <mc:Choice xmlns:p14="http://schemas.microsoft.com/office/powerpoint/2010/main" Requires="p14">
+      <p:transition p14:dur="10" advClick="0" advTm="30000"/>
+    </mc:Choice>
+    <mc:Fallback>
+      <p:transition advClick="0" advTm="30000"/>
+    </mc:Fallback>
+  </mc:AlternateContent>
   <p:txStyles>
     <p:titleStyle>
       <a:lvl1pPr algn="l" defTabSz="914400" rtl="0" eaLnBrk="1" latinLnBrk="0" hangingPunct="1">
@@ -13877,6 +13981,14 @@
   <p:clrMapOvr>
     <a:masterClrMapping/>
   </p:clrMapOvr>
+  <mc:AlternateContent xmlns:mc="http://schemas.openxmlformats.org/markup-compatibility/2006">
+    <mc:Choice xmlns:p14="http://schemas.microsoft.com/office/powerpoint/2010/main" Requires="p14">
+      <p:transition p14:dur="0" advClick="0" advTm="26000"/>
+    </mc:Choice>
+    <mc:Fallback>
+      <p:transition advClick="0" advTm="26000"/>
+    </mc:Fallback>
+  </mc:AlternateContent>
 </p:sld>
 </file>
 
@@ -13927,7 +14039,7 @@
           <a:p>
             <a:r>
               <a:rPr lang="ru-RU" sz="2600" dirty="0"/>
-              <a:t>Вывод: намерение уйти связано прежде всего со средой — это окно для вмешательства</a:t>
+              <a:t>Вывод: намерение уйти связано прежде всего со средой</a:t>
             </a:r>
           </a:p>
         </p:txBody>
@@ -14201,8 +14313,8 @@
         </p:nvSpPr>
         <p:spPr>
           <a:xfrm>
-            <a:off x="585898" y="2720928"/>
-            <a:ext cx="9956800" cy="1646791"/>
+            <a:off x="585898" y="2438824"/>
+            <a:ext cx="9956800" cy="2016442"/>
           </a:xfrm>
           <a:prstGeom prst="rect">
             <a:avLst/>
@@ -14225,39 +14337,77 @@
               </a:spcAft>
             </a:pPr>
             <a:r>
+              <a:rPr lang="ru-RU" sz="1500" noProof="1">
+                <a:latin typeface="HSE Sans" panose="02000000000000000000" pitchFamily="50" charset="0"/>
+                <a:ea typeface="MiSans"/>
+              </a:rPr>
+              <a:t>На вопрос «среда или жизнь» данные отвечают однозначно: уникальный вклад образовательной среды и научного руководства — </a:t>
+            </a:r>
+            <a:r>
+              <a:rPr lang="ru-RU" sz="1500" b="1" noProof="1">
+                <a:latin typeface="HSE Sans" panose="02000000000000000000" pitchFamily="50" charset="0"/>
+                <a:ea typeface="MiSans"/>
+              </a:rPr>
+              <a:t>63%</a:t>
+            </a:r>
+            <a:r>
+              <a:rPr lang="ru-RU" sz="1500" noProof="1">
+                <a:latin typeface="HSE Sans" panose="02000000000000000000" pitchFamily="50" charset="0"/>
+                <a:ea typeface="MiSans"/>
+              </a:rPr>
+              <a:t> полного Tjur R² против </a:t>
+            </a:r>
+            <a:r>
+              <a:rPr lang="ru-RU" sz="1500" b="1" noProof="1">
+                <a:latin typeface="HSE Sans" panose="02000000000000000000" pitchFamily="50" charset="0"/>
+                <a:ea typeface="MiSans"/>
+              </a:rPr>
+              <a:t>6%</a:t>
+            </a:r>
+            <a:r>
+              <a:rPr lang="ru-RU" sz="1500" noProof="1">
+                <a:latin typeface="HSE Sans" panose="02000000000000000000" pitchFamily="50" charset="0"/>
+                <a:ea typeface="MiSans"/>
+              </a:rPr>
+              <a:t> у жизненных обстоятельств;</a:t>
+            </a:r>
+          </a:p>
+          <a:p>
+            <a:pPr>
+              <a:lnSpc>
+                <a:spcPct val="120000"/>
+              </a:lnSpc>
+              <a:spcAft>
+                <a:spcPts val="1200"/>
+              </a:spcAft>
+            </a:pPr>
+            <a:r>
+              <a:rPr lang="ru-RU" sz="1500" b="1" noProof="1">
+                <a:latin typeface="HSE Sans" panose="02000000000000000000" pitchFamily="50" charset="0"/>
+                <a:ea typeface="MiSans"/>
+              </a:rPr>
+              <a:t>Н</a:t>
+            </a:r>
+            <a:r>
+              <a:rPr lang="en-US" sz="1500" b="1" noProof="1">
+                <a:latin typeface="HSE Sans" panose="02000000000000000000" pitchFamily="50" charset="0"/>
+                <a:ea typeface="MiSans"/>
+              </a:rPr>
+              <a:t>еразделимая часть — лишь 11%. </a:t>
+            </a:r>
+            <a:r>
+              <a:rPr lang="ru-RU" sz="1500" noProof="1">
+                <a:latin typeface="HSE Sans" panose="02000000000000000000" pitchFamily="50" charset="0"/>
+                <a:ea typeface="MiSans"/>
+              </a:rPr>
+              <a:t>То есть блоки не только различаются по весу — их можно отделить друг от друга: неразделимая доля составляет лишь около десятой полного </a:t>
+            </a:r>
+            <a:r>
               <a:rPr lang="en-US" sz="1500" noProof="1">
                 <a:latin typeface="HSE Sans" panose="02000000000000000000" pitchFamily="50" charset="0"/>
                 <a:ea typeface="MiSans"/>
               </a:rPr>
-              <a:t>На вопрос «среда или жизнь» данные отвечают однозначно: уникальный вклад образовательной среды и научного руководства — </a:t>
-            </a:r>
-            <a:r>
-              <a:rPr lang="en-US" sz="1500" b="1" noProof="1">
-                <a:latin typeface="HSE Sans" panose="02000000000000000000" pitchFamily="50" charset="0"/>
-                <a:ea typeface="MiSans"/>
-              </a:rPr>
-              <a:t>63%</a:t>
-            </a:r>
-            <a:r>
-              <a:rPr lang="en-US" sz="1500" noProof="1">
-                <a:latin typeface="HSE Sans" panose="02000000000000000000" pitchFamily="50" charset="0"/>
-                <a:ea typeface="MiSans"/>
-              </a:rPr>
-              <a:t> объяснённой вариации против </a:t>
-            </a:r>
-            <a:r>
-              <a:rPr lang="en-US" sz="1500" b="1" noProof="1">
-                <a:latin typeface="HSE Sans" panose="02000000000000000000" pitchFamily="50" charset="0"/>
-                <a:ea typeface="MiSans"/>
-              </a:rPr>
-              <a:t>6%</a:t>
-            </a:r>
-            <a:r>
-              <a:rPr lang="en-US" sz="1500" noProof="1">
-                <a:latin typeface="HSE Sans" panose="02000000000000000000" pitchFamily="50" charset="0"/>
-                <a:ea typeface="MiSans"/>
-              </a:rPr>
-              <a:t> у жизненных обстоятельств; </a:t>
+              <a:t>Tjur R².</a:t>
             </a:r>
             <a:endParaRPr lang="ru-RU" sz="1500" noProof="1">
               <a:latin typeface="HSE Sans" panose="02000000000000000000" pitchFamily="50" charset="0"/>
@@ -14269,41 +14419,16 @@
               <a:lnSpc>
                 <a:spcPct val="120000"/>
               </a:lnSpc>
+              <a:spcAft>
+                <a:spcPts val="1200"/>
+              </a:spcAft>
             </a:pPr>
-            <a:r>
-              <a:rPr lang="ru-RU" sz="1500" b="1" noProof="1">
-                <a:latin typeface="HSE Sans" panose="02000000000000000000" pitchFamily="50" charset="0"/>
-                <a:ea typeface="MiSans"/>
-              </a:rPr>
-              <a:t>Н</a:t>
-            </a:r>
-            <a:r>
-              <a:rPr lang="en-US" sz="1500" b="1" noProof="1">
-                <a:latin typeface="HSE Sans" panose="02000000000000000000" pitchFamily="50" charset="0"/>
-                <a:ea typeface="MiSans"/>
-              </a:rPr>
-              <a:t>еразделимая часть — лишь 11%. </a:t>
-            </a:r>
             <a:r>
               <a:rPr lang="ru-RU" sz="1500" noProof="1">
                 <a:latin typeface="HSE Sans" panose="02000000000000000000" pitchFamily="50" charset="0"/>
                 <a:ea typeface="MiSans"/>
               </a:rPr>
-              <a:t>То есть блоки не только различаются по весу — их можно отделить друг от друга: неразделимая доля составляет лишь около десятой объяснённой вариации. </a:t>
-            </a:r>
-          </a:p>
-          <a:p>
-            <a:pPr>
-              <a:lnSpc>
-                <a:spcPct val="120000"/>
-              </a:lnSpc>
-            </a:pPr>
-            <a:r>
-              <a:rPr lang="en-US" sz="1500" noProof="1">
-                <a:latin typeface="HSE Sans" panose="02000000000000000000" pitchFamily="50" charset="0"/>
-                <a:ea typeface="MiSans"/>
-              </a:rPr>
-              <a:t>Намерение уйти — не отсев: это ранняя, обратимая стадия ухода, и именно она даёт вузу окно для вмешательства.</a:t>
+              <a:t>Намерение уйти — не зарегистрированный отсев, а потенциально ранний сигнал риска; его переход в отсев и обратимость требуют лонгитюдной проверки.</a:t>
             </a:r>
             <a:endParaRPr lang="en-US" sz="1500" noProof="1">
               <a:latin typeface="HSE Sans" panose="02000000000000000000" pitchFamily="50" charset="0"/>
@@ -14329,7 +14454,7 @@
         </p:nvSpPr>
         <p:spPr>
           <a:xfrm>
-            <a:off x="585898" y="4625508"/>
+            <a:off x="585898" y="4839519"/>
             <a:ext cx="5245561" cy="1347280"/>
           </a:xfrm>
         </p:spPr>
@@ -14391,7 +14516,7 @@
         </p:nvSpPr>
         <p:spPr>
           <a:xfrm>
-            <a:off x="6360543" y="4625507"/>
+            <a:off x="6360543" y="4839518"/>
             <a:ext cx="5245561" cy="1347281"/>
           </a:xfrm>
           <a:prstGeom prst="rect">
@@ -14618,6 +14743,14 @@
   <p:clrMapOvr>
     <a:masterClrMapping/>
   </p:clrMapOvr>
+  <mc:AlternateContent xmlns:mc="http://schemas.openxmlformats.org/markup-compatibility/2006">
+    <mc:Choice xmlns:p14="http://schemas.microsoft.com/office/powerpoint/2010/main" Requires="p14">
+      <p:transition p14:dur="0" advClick="0" advTm="26000"/>
+    </mc:Choice>
+    <mc:Fallback>
+      <p:transition advClick="0" advTm="26000"/>
+    </mc:Fallback>
+  </mc:AlternateContent>
 </p:sld>
 </file>
 
@@ -15509,6 +15642,23 @@
               <a:lnSpc>
                 <a:spcPct val="110000"/>
               </a:lnSpc>
+              <a:spcBef>
+                <a:spcPts val="0"/>
+              </a:spcBef>
+              <a:spcAft>
+                <a:spcPts val="2000"/>
+              </a:spcAft>
+            </a:pPr>
+            <a:r>
+              <a:rPr lang="ru-RU" dirty="0"/>
+              <a:t>Среда управляема вузом, обстоятельства — нет; что из них перевешивает, на российских данных не измерял никто.</a:t>
+            </a:r>
+          </a:p>
+          <a:p>
+            <a:pPr>
+              <a:lnSpc>
+                <a:spcPct val="110000"/>
+              </a:lnSpc>
               <a:spcAft>
                 <a:spcPts val="1200"/>
               </a:spcAft>
@@ -15571,6 +15721,14 @@
   <p:clrMapOvr>
     <a:masterClrMapping/>
   </p:clrMapOvr>
+  <mc:AlternateContent xmlns:mc="http://schemas.openxmlformats.org/markup-compatibility/2006">
+    <mc:Choice xmlns:p14="http://schemas.microsoft.com/office/powerpoint/2010/main" Requires="p14">
+      <p:transition p14:dur="0" advClick="0" advTm="26000"/>
+    </mc:Choice>
+    <mc:Fallback>
+      <p:transition advClick="0" advTm="26000"/>
+    </mc:Fallback>
+  </mc:AlternateContent>
 </p:sld>
 </file>
 
@@ -16083,6 +16241,14 @@
   <p:clrMapOvr>
     <a:masterClrMapping/>
   </p:clrMapOvr>
+  <mc:AlternateContent xmlns:mc="http://schemas.openxmlformats.org/markup-compatibility/2006">
+    <mc:Choice xmlns:p14="http://schemas.microsoft.com/office/powerpoint/2010/main" Requires="p14">
+      <p:transition p14:dur="0" advClick="0" advTm="26000"/>
+    </mc:Choice>
+    <mc:Fallback>
+      <p:transition advClick="0" advTm="26000"/>
+    </mc:Fallback>
+  </mc:AlternateContent>
 </p:sld>
 </file>
 
@@ -16759,6 +16925,14 @@
   <p:clrMapOvr>
     <a:masterClrMapping/>
   </p:clrMapOvr>
+  <mc:AlternateContent xmlns:mc="http://schemas.openxmlformats.org/markup-compatibility/2006">
+    <mc:Choice xmlns:p14="http://schemas.microsoft.com/office/powerpoint/2010/main" Requires="p14">
+      <p:transition p14:dur="0" advClick="0" advTm="26000"/>
+    </mc:Choice>
+    <mc:Fallback>
+      <p:transition advClick="0" advTm="26000"/>
+    </mc:Fallback>
+  </mc:AlternateContent>
 </p:sld>
 </file>
 
@@ -17388,6 +17562,14 @@
   <p:clrMapOvr>
     <a:masterClrMapping/>
   </p:clrMapOvr>
+  <mc:AlternateContent xmlns:mc="http://schemas.openxmlformats.org/markup-compatibility/2006">
+    <mc:Choice xmlns:p14="http://schemas.microsoft.com/office/powerpoint/2010/main" Requires="p14">
+      <p:transition p14:dur="0" advClick="0" advTm="26000"/>
+    </mc:Choice>
+    <mc:Fallback>
+      <p:transition advClick="0" advTm="26000"/>
+    </mc:Fallback>
+  </mc:AlternateContent>
 </p:sld>
 </file>
 
@@ -18594,6 +18776,14 @@
   <p:clrMapOvr>
     <a:masterClrMapping/>
   </p:clrMapOvr>
+  <mc:AlternateContent xmlns:mc="http://schemas.openxmlformats.org/markup-compatibility/2006">
+    <mc:Choice xmlns:p14="http://schemas.microsoft.com/office/powerpoint/2010/main" Requires="p14">
+      <p:transition p14:dur="0" advClick="0" advTm="26000"/>
+    </mc:Choice>
+    <mc:Fallback>
+      <p:transition advClick="0" advTm="26000"/>
+    </mc:Fallback>
+  </mc:AlternateContent>
 </p:sld>
 </file>
 
@@ -18948,8 +19138,8 @@
         </p:nvSpPr>
         <p:spPr>
           <a:xfrm>
-            <a:off x="8432800" y="2559997"/>
-            <a:ext cx="2997200" cy="2644301"/>
+            <a:off x="8598170" y="2177856"/>
+            <a:ext cx="2997200" cy="3482514"/>
           </a:xfrm>
           <a:prstGeom prst="rect">
             <a:avLst/>
@@ -18968,7 +19158,7 @@
                 <a:spcPct val="120000"/>
               </a:lnSpc>
               <a:spcAft>
-                <a:spcPts val="1200"/>
+                <a:spcPts val="800"/>
               </a:spcAft>
             </a:pPr>
             <a:r>
@@ -18992,10 +19182,10 @@
                 <a:spcPct val="120000"/>
               </a:lnSpc>
               <a:spcBef>
-                <a:spcPts val="800"/>
+                <a:spcPts val="400"/>
               </a:spcBef>
               <a:spcAft>
-                <a:spcPts val="600"/>
+                <a:spcPts val="400"/>
               </a:spcAft>
             </a:pPr>
             <a:r>
@@ -19010,7 +19200,14 @@
                 <a:latin typeface="HSE Sans" panose="02000000000000000000" pitchFamily="50" charset="0"/>
                 <a:ea typeface="MiSans"/>
               </a:rPr>
-              <a:t>— минимальные принадлежность, качество образования и удовлетворённость руководителем.</a:t>
+              <a:t>— минимальные принадлежность, качество образования и удовлетворённость руководителем</a:t>
+            </a:r>
+            <a:r>
+              <a:rPr lang="ru-RU" sz="1300" noProof="1">
+                <a:latin typeface="HSE Sans" panose="02000000000000000000" pitchFamily="50" charset="0"/>
+                <a:ea typeface="MiSans"/>
+              </a:rPr>
+              <a:t>;</a:t>
             </a:r>
             <a:endParaRPr lang="en-US" sz="1300" noProof="1">
               <a:latin typeface="HSE Sans" panose="02000000000000000000" pitchFamily="50" charset="0"/>
@@ -19025,26 +19222,23 @@
                 <a:spcPts val="800"/>
               </a:spcBef>
               <a:spcAft>
-                <a:spcPts val="600"/>
+                <a:spcPts val="400"/>
               </a:spcAft>
             </a:pPr>
             <a:r>
-              <a:rPr lang="en-US" sz="1300" b="1" noProof="1">
+              <a:rPr lang="ru-RU" sz="1300" b="1" noProof="1">
                 <a:latin typeface="HSE Sans" panose="02000000000000000000" pitchFamily="50" charset="0"/>
                 <a:ea typeface="MiSans"/>
               </a:rPr>
               <a:t>У стеснённого </a:t>
             </a:r>
             <a:r>
-              <a:rPr lang="en-US" sz="1300" noProof="1">
+              <a:rPr lang="ru-RU" sz="1300" noProof="1">
                 <a:latin typeface="HSE Sans" panose="02000000000000000000" pitchFamily="50" charset="0"/>
                 <a:ea typeface="MiSans"/>
               </a:rPr>
-              <a:t>— работа без связи с диссертацией, низкий доход, трудности.</a:t>
-            </a:r>
-            <a:endParaRPr lang="en-US" sz="1300" noProof="1">
-              <a:latin typeface="HSE Sans" panose="02000000000000000000" pitchFamily="50" charset="0"/>
-            </a:endParaRPr>
+              <a:t>— низкий доход и шесть ковидных трудностей;</a:t>
+            </a:r>
           </a:p>
           <a:p>
             <a:pPr>
@@ -19055,37 +19249,49 @@
                 <a:spcPts val="800"/>
               </a:spcBef>
               <a:spcAft>
-                <a:spcPts val="600"/>
+                <a:spcPts val="400"/>
               </a:spcAft>
             </a:pPr>
             <a:r>
-              <a:rPr lang="en-US" sz="1300" b="1" noProof="1">
+              <a:rPr lang="ru-RU" sz="1300" b="1" noProof="1">
+                <a:latin typeface="HSE Sans" panose="02000000000000000000" pitchFamily="50" charset="0"/>
+              </a:rPr>
+              <a:t>Отдельный профиль </a:t>
+            </a:r>
+            <a:r>
+              <a:rPr lang="ru-RU" sz="1300" noProof="1">
+                <a:latin typeface="HSE Sans" panose="02000000000000000000" pitchFamily="50" charset="0"/>
+              </a:rPr>
+              <a:t>— работа вне вуза, слабо связанная с темой диссертации;</a:t>
+            </a:r>
+          </a:p>
+          <a:p>
+            <a:pPr>
+              <a:lnSpc>
+                <a:spcPct val="120000"/>
+              </a:lnSpc>
+              <a:spcBef>
+                <a:spcPts val="800"/>
+              </a:spcBef>
+              <a:spcAft>
+                <a:spcPts val="400"/>
+              </a:spcAft>
+            </a:pPr>
+            <a:r>
+              <a:rPr lang="ru-RU" sz="1300" b="1" noProof="1">
                 <a:latin typeface="HSE Sans" panose="02000000000000000000" pitchFamily="50" charset="0"/>
                 <a:ea typeface="MiSans"/>
               </a:rPr>
-              <a:t>Медианный аспирант</a:t>
-            </a:r>
-            <a:r>
-              <a:rPr lang="en-US" sz="1300" noProof="1">
+              <a:t>Медианный сценарий </a:t>
+            </a:r>
+            <a:r>
+              <a:rPr lang="ru-RU" sz="1300" noProof="1">
                 <a:latin typeface="HSE Sans" panose="02000000000000000000" pitchFamily="50" charset="0"/>
                 <a:ea typeface="MiSans"/>
               </a:rPr>
-              <a:t> — все факторы в медиане: 10,8%.</a:t>
-            </a:r>
-          </a:p>
-          <a:p>
-            <a:pPr>
-              <a:lnSpc>
-                <a:spcPct val="120000"/>
-              </a:lnSpc>
-              <a:spcBef>
-                <a:spcPts val="800"/>
-              </a:spcBef>
-              <a:spcAft>
-                <a:spcPts val="600"/>
-              </a:spcAft>
-            </a:pPr>
-            <a:endParaRPr lang="ru-RU" sz="1300" b="1" noProof="1">
+              <a:t>— все характеристики заданы на медианном уровне.</a:t>
+            </a:r>
+            <a:endParaRPr lang="ru-RU" sz="1300" noProof="1">
               <a:latin typeface="HSE Sans" panose="02000000000000000000" pitchFamily="50" charset="0"/>
             </a:endParaRPr>
           </a:p>
@@ -19121,8 +19327,8 @@
         </p:nvSpPr>
         <p:spPr>
           <a:xfrm>
-            <a:off x="8861911" y="5712291"/>
-            <a:ext cx="2733459" cy="798680"/>
+            <a:off x="9114830" y="5712291"/>
+            <a:ext cx="2616727" cy="798680"/>
           </a:xfrm>
           <a:prstGeom prst="rect">
             <a:avLst/>
@@ -19150,13 +19356,13 @@
               <a:rPr lang="ru-RU" sz="1300" b="1" noProof="1">
                 <a:latin typeface="HSE Sans" panose="02000000000000000000" pitchFamily="50" charset="0"/>
               </a:rPr>
-              <a:t>Предсказанные вероятности полной модели</a:t>
+              <a:t>Среднее по 20 импутациям; усы: </a:t>
             </a:r>
             <a:r>
               <a:rPr lang="ru-RU" sz="1300" noProof="1">
                 <a:latin typeface="HSE Sans" panose="02000000000000000000" pitchFamily="50" charset="0"/>
               </a:rPr>
-              <a:t>, усреднение по 20 импутациям, 95% ДИ</a:t>
+              <a:t>mean ± 1,96 SD между импутациями.</a:t>
             </a:r>
           </a:p>
         </p:txBody>
@@ -19171,6 +19377,14 @@
   <p:clrMapOvr>
     <a:masterClrMapping/>
   </p:clrMapOvr>
+  <mc:AlternateContent xmlns:mc="http://schemas.openxmlformats.org/markup-compatibility/2006">
+    <mc:Choice xmlns:p14="http://schemas.microsoft.com/office/powerpoint/2010/main" Requires="p14">
+      <p:transition p14:dur="0" advClick="0" advTm="26000"/>
+    </mc:Choice>
+    <mc:Fallback>
+      <p:transition advClick="0" advTm="26000"/>
+    </mc:Fallback>
+  </mc:AlternateContent>
 </p:sld>
 </file>
 
@@ -19209,7 +19423,7 @@
         </p:nvSpPr>
         <p:spPr>
           <a:xfrm>
-            <a:off x="585897" y="1301871"/>
+            <a:off x="585897" y="1253232"/>
             <a:ext cx="10182622" cy="945214"/>
           </a:xfrm>
         </p:spPr>
@@ -19525,8 +19739,8 @@
         </p:nvSpPr>
         <p:spPr>
           <a:xfrm>
-            <a:off x="8362619" y="2449667"/>
-            <a:ext cx="3427303" cy="3822973"/>
+            <a:off x="8362619" y="2180692"/>
+            <a:ext cx="3427303" cy="3553022"/>
           </a:xfrm>
           <a:prstGeom prst="rect">
             <a:avLst/>
@@ -19545,123 +19759,114 @@
                 <a:spcPct val="120000"/>
               </a:lnSpc>
               <a:spcAft>
-                <a:spcPts val="800"/>
+                <a:spcPts val="1200"/>
               </a:spcAft>
             </a:pPr>
             <a:r>
-              <a:rPr lang="en-US" sz="1300" noProof="1">
+              <a:rPr lang="ru-RU" sz="1250" b="1" noProof="1">
                 <a:latin typeface="HSE Sans" panose="02000000000000000000" pitchFamily="50" charset="0"/>
                 <a:ea typeface="MiSans"/>
               </a:rPr>
-              <a:t>Добавление </a:t>
-            </a:r>
-            <a:r>
-              <a:rPr lang="en-US" sz="1300" b="1" noProof="1">
+              <a:t>PHQ-8</a:t>
+            </a:r>
+            <a:r>
+              <a:rPr lang="ru-RU" sz="1250" noProof="1">
                 <a:latin typeface="HSE Sans" panose="02000000000000000000" pitchFamily="50" charset="0"/>
                 <a:ea typeface="MiSans"/>
               </a:rPr>
-              <a:t>PHQ-8</a:t>
-            </a:r>
-            <a:r>
-              <a:rPr lang="en-US" sz="1300" noProof="1">
+              <a:t> </a:t>
+            </a:r>
+            <a:r>
+              <a:rPr lang="ru-RU" sz="1250" b="1" noProof="1">
                 <a:latin typeface="HSE Sans" panose="02000000000000000000" pitchFamily="50" charset="0"/>
                 <a:ea typeface="MiSans"/>
               </a:rPr>
-              <a:t> в модель </a:t>
-            </a:r>
-            <a:r>
-              <a:rPr lang="en-US" sz="1300" b="1" noProof="1">
+              <a:t>ослабляет ключевые связи среды на 2–16%, связи руководства почти не меняются</a:t>
+            </a:r>
+            <a:r>
+              <a:rPr lang="ru-RU" sz="1250" noProof="1">
                 <a:latin typeface="HSE Sans" panose="02000000000000000000" pitchFamily="50" charset="0"/>
                 <a:ea typeface="MiSans"/>
               </a:rPr>
-              <a:t>ослабляет эффекты среды и руководства всего на 2–16%</a:t>
-            </a:r>
-            <a:r>
-              <a:rPr lang="en-US" sz="1300" noProof="1">
+              <a:t>; показанные связи значимы (p &lt; 0,001): </a:t>
+            </a:r>
+            <a:r>
+              <a:rPr lang="ru-RU" sz="1250" b="1" noProof="1">
                 <a:latin typeface="HSE Sans" panose="02000000000000000000" pitchFamily="50" charset="0"/>
                 <a:ea typeface="MiSans"/>
               </a:rPr>
-              <a:t>, все связи остаются значимыми (p ≤ 5·10⁻⁴): среда не сводится к самочувствию аспиранта.</a:t>
-            </a:r>
-            <a:endParaRPr lang="en-US" sz="1300" noProof="1">
-              <a:latin typeface="HSE Sans" panose="02000000000000000000" pitchFamily="50" charset="0"/>
-            </a:endParaRPr>
+              <a:t>среда не сводится к самочувствию аспиранта.</a:t>
+            </a:r>
           </a:p>
           <a:p>
             <a:pPr>
               <a:lnSpc>
                 <a:spcPct val="120000"/>
               </a:lnSpc>
-              <a:spcBef>
-                <a:spcPts val="800"/>
-              </a:spcBef>
               <a:spcAft>
-                <a:spcPts val="800"/>
+                <a:spcPts val="1200"/>
               </a:spcAft>
             </a:pPr>
             <a:r>
-              <a:rPr lang="ru-RU" sz="1300" noProof="1">
+              <a:rPr lang="ru-RU" sz="1250" noProof="1">
                 <a:latin typeface="HSE Sans" panose="02000000000000000000" pitchFamily="50" charset="0"/>
                 <a:ea typeface="MiSans"/>
               </a:rPr>
-              <a:t>Порядковая модель на исходной 4-балльной шкале целевой и полная выборка (n = 4631) </a:t>
-            </a:r>
-            <a:r>
-              <a:rPr lang="ru-RU" sz="1300" b="1" noProof="1">
+              <a:t>Порядковая модель исходной 4-балльной целевой </a:t>
+            </a:r>
+            <a:r>
+              <a:rPr lang="ru-RU" sz="1250" b="1" noProof="1">
                 <a:latin typeface="HSE Sans" panose="02000000000000000000" pitchFamily="50" charset="0"/>
                 <a:ea typeface="MiSans"/>
               </a:rPr>
-              <a:t>воспроизводят тот же рейтинг</a:t>
-            </a:r>
-            <a:r>
-              <a:rPr lang="ru-RU" sz="1300" noProof="1">
+              <a:t>воспроизводит рейтинг блоков</a:t>
+            </a:r>
+            <a:r>
+              <a:rPr lang="ru-RU" sz="1250" noProof="1">
                 <a:latin typeface="HSE Sans" panose="02000000000000000000" pitchFamily="50" charset="0"/>
                 <a:ea typeface="MiSans"/>
               </a:rPr>
-              <a:t> </a:t>
-            </a:r>
-            <a:r>
-              <a:rPr lang="ru-RU" sz="1300" b="1" noProof="1">
+              <a:t>. Модель без S-индексов на всех наблюдениях с непустой целевой (n = 4631; 20 импутаций) сохраняет основные связи E/L: </a:t>
+            </a:r>
+            <a:r>
+              <a:rPr lang="ru-RU" sz="1250" b="1" noProof="1">
                 <a:latin typeface="HSE Sans" panose="02000000000000000000" pitchFamily="50" charset="0"/>
                 <a:ea typeface="MiSans"/>
               </a:rPr>
-              <a:t>блоков</a:t>
-            </a:r>
-            <a:r>
-              <a:rPr lang="ru-RU" sz="1300" noProof="1">
+              <a:t>выводы устойчивы к кодированию целевой и составу выборки.</a:t>
+            </a:r>
+          </a:p>
+          <a:p>
+            <a:pPr>
+              <a:lnSpc>
+                <a:spcPct val="120000"/>
+              </a:lnSpc>
+              <a:spcAft>
+                <a:spcPts val="1200"/>
+              </a:spcAft>
+            </a:pPr>
+            <a:r>
+              <a:rPr lang="ru-RU" sz="1250" b="1" noProof="1">
                 <a:latin typeface="HSE Sans" panose="02000000000000000000" pitchFamily="50" charset="0"/>
                 <a:ea typeface="MiSans"/>
               </a:rPr>
-              <a:t> — вывод не зависит от дихотомизации и состава выборки.</a:t>
-            </a:r>
-          </a:p>
-          <a:p>
-            <a:pPr>
-              <a:lnSpc>
-                <a:spcPct val="120000"/>
-              </a:lnSpc>
-              <a:spcBef>
-                <a:spcPts val="800"/>
-              </a:spcBef>
-              <a:spcAft>
-                <a:spcPts val="800"/>
-              </a:spcAft>
-            </a:pPr>
-            <a:r>
-              <a:rPr lang="en-US" sz="1300" b="1" noProof="1">
+              <a:t>ICC: </a:t>
+            </a:r>
+            <a:r>
+              <a:rPr lang="ru-RU" sz="1250" noProof="1">
                 <a:latin typeface="HSE Sans" panose="02000000000000000000" pitchFamily="50" charset="0"/>
                 <a:ea typeface="MiSans"/>
               </a:rPr>
-              <a:t>Доля межвузовской дисперсии ICC = 0,031</a:t>
-            </a:r>
-            <a:r>
-              <a:rPr lang="en-US" sz="1300" noProof="1">
+              <a:t>0,031 (нуль-модель), 0,017 (полная); </a:t>
+            </a:r>
+            <a:r>
+              <a:rPr lang="ru-RU" sz="1250" b="1" noProof="1">
                 <a:latin typeface="HSE Sans" panose="02000000000000000000" pitchFamily="50" charset="0"/>
                 <a:ea typeface="MiSans"/>
               </a:rPr>
-              <a:t>: результат не артефакт отдельных вузов.</a:t>
-            </a:r>
-            <a:endParaRPr lang="en-US" sz="1300" noProof="1">
+              <a:t>ключевые связи E/S сохраняются при кластерно-робастных SE.</a:t>
+            </a:r>
+            <a:endParaRPr lang="en-US" sz="1250" noProof="1">
               <a:latin typeface="HSE Sans" panose="02000000000000000000" pitchFamily="50" charset="0"/>
             </a:endParaRPr>
           </a:p>
@@ -19731,6 +19936,14 @@
   <p:clrMapOvr>
     <a:masterClrMapping/>
   </p:clrMapOvr>
+  <mc:AlternateContent xmlns:mc="http://schemas.openxmlformats.org/markup-compatibility/2006">
+    <mc:Choice xmlns:p14="http://schemas.microsoft.com/office/powerpoint/2010/main" Requires="p14">
+      <p:transition p14:dur="0" advClick="0" advTm="26000"/>
+    </mc:Choice>
+    <mc:Fallback>
+      <p:transition advClick="0" advTm="26000"/>
+    </mc:Fallback>
+  </mc:AlternateContent>
 </p:sld>
 </file>
 
@@ -19781,7 +19994,7 @@
           <a:p>
             <a:r>
               <a:rPr lang="ru-RU" sz="2600" dirty="0"/>
-              <a:t>Проверка гипотез: две подтвердились, две — нет</a:t>
+              <a:t>Проверка гипотез</a:t>
             </a:r>
           </a:p>
         </p:txBody>
@@ -20103,7 +20316,7 @@
             </a:r>
             <a:r>
               <a:rPr lang="ru-RU" sz="1400" dirty="0"/>
-              <a:t>Уникальный вклад G1 = 63% объяснённой вариации против 6% у G2; LMG-рейтинг: среда 50% + руководство 24% против 10% у обстоятельств</a:t>
+              <a:t>Уникальный вклад G1 = 63% полного Tjur R² против 6% у G2; LMG-рейтинг: среда 50% + руководство 24% против 10% у обстоятельств;</a:t>
             </a:r>
           </a:p>
           <a:p>
@@ -20134,7 +20347,7 @@
             </a:pPr>
             <a:r>
               <a:rPr lang="ru-RU" sz="1400" b="1" dirty="0"/>
-              <a:t>H2. Обстоятельства не сводятся к нулю: у работающих связь работы с диссертацией снижает риск</a:t>
+              <a:t>H2. Работа вне вуза и низкий доход повышают риск, а связь работы с диссертацией снижает его.</a:t>
             </a:r>
           </a:p>
           <a:p>
@@ -20151,26 +20364,12 @@
             </a:pPr>
             <a:r>
               <a:rPr lang="ru-RU" sz="1400" b="1" dirty="0"/>
-              <a:t>✔ Подтвердилась частично. </a:t>
+              <a:t>◐ Подтвердилась частично. </a:t>
             </a:r>
             <a:r>
               <a:rPr lang="ru-RU" sz="1400" dirty="0"/>
-              <a:t>Уникальная доля обстоятельств — лишь 6%, работа вне вуза сама по себе риска не добавляет (22,1% ≈ среднему 21,7%); но связь работы с темой защищает: OR = 0,87 за балл у работающих вне вуза (p ≈ 2·10⁻¹⁰) и OR = 0,88 у работающих в вузе (p ≈ 1·10⁻⁵)</a:t>
-            </a:r>
-          </a:p>
-          <a:p>
-            <a:pPr>
-              <a:lnSpc>
-                <a:spcPct val="120000"/>
-              </a:lnSpc>
-              <a:spcBef>
-                <a:spcPts val="0"/>
-              </a:spcBef>
-              <a:spcAft>
-                <a:spcPts val="1200"/>
-              </a:spcAft>
-            </a:pPr>
-            <a:endParaRPr lang="ru-RU" sz="1400" dirty="0"/>
+              <a:t>Работа вне вуза и низкий доход сами по себе риска не добавляют; но более тесная связь работы с темой диссертации связана с меньшими шансами намерения уйти: OR = 0,87 вне вуза и 0,88 в вузе.</a:t>
+            </a:r>
           </a:p>
         </p:txBody>
       </p:sp>
@@ -20402,11 +20601,11 @@
             </a:pPr>
             <a:r>
               <a:rPr lang="ru-RU" sz="1400" b="1" dirty="0"/>
-              <a:t>✖ Не подтвердилась в сильной форме. </a:t>
+              <a:t>◐ Подтвердилась частично. </a:t>
             </a:r>
             <a:r>
               <a:rPr lang="ru-RU" sz="1400" dirty="0"/>
-              <a:t>Индивидуальные эффекты среды ослабевают лишь на 2–16% и остаются значимыми (p ≤ 5·10⁻⁴). При этом на уровне блока PHQ-8 забирает 23% уникальной доли среды — часть связи действительно общая, фиксируем это явно.</a:t>
+              <a:t>Ключевые связи среды ослабевают на 2–16%, связи руководства почти не меняются; при этом уникальная доля G1 снижается на 23%. Это ассоциация, не доказанная медиация.</a:t>
             </a:r>
           </a:p>
           <a:p>
@@ -20458,22 +20657,8 @@
             </a:r>
             <a:r>
               <a:rPr lang="ru-RU" sz="1400" dirty="0"/>
-              <a:t>Взаимодействие «удовлетворённость × академическая цель» незначимо (p = 0,33); при низкой удовлетворённости риск одинаково высок у обеих групп (27,1% и 27,6%)</a:t>
-            </a:r>
-          </a:p>
-          <a:p>
-            <a:pPr>
-              <a:lnSpc>
-                <a:spcPct val="120000"/>
-              </a:lnSpc>
-              <a:spcBef>
-                <a:spcPts val="0"/>
-              </a:spcBef>
-              <a:spcAft>
-                <a:spcPts val="1200"/>
-              </a:spcAft>
-            </a:pPr>
-            <a:endParaRPr lang="ru-RU" sz="1400" dirty="0"/>
+              <a:t>Взаимодействие «удовлетворённость × академическая цель» незначимо (p = 0,33); при низкой удовлетворённости прогнозы описательно близки: 27,1% и 27,6%; равенство эффектов не доказано.</a:t>
+            </a:r>
           </a:p>
           <a:p>
             <a:pPr>
@@ -20501,6 +20686,14 @@
   <p:clrMapOvr>
     <a:masterClrMapping/>
   </p:clrMapOvr>
+  <mc:AlternateContent xmlns:mc="http://schemas.openxmlformats.org/markup-compatibility/2006">
+    <mc:Choice xmlns:p14="http://schemas.microsoft.com/office/powerpoint/2010/main" Requires="p14">
+      <p:transition p14:dur="0" advClick="0" advTm="26000"/>
+    </mc:Choice>
+    <mc:Fallback>
+      <p:transition advClick="0" advTm="26000"/>
+    </mc:Fallback>
+  </mc:AlternateContent>
 </p:sld>
 </file>
 
@@ -21111,12 +21304,21 @@
 </file>
 
 <file path=customXml/item1.xml><?xml version="1.0" encoding="utf-8"?>
+<?mso-contentType ?>
+<FormTemplates xmlns="http://schemas.microsoft.com/sharepoint/v3/contenttype/forms">
+  <Display>DocumentLibraryForm</Display>
+  <Edit>DocumentLibraryForm</Edit>
+  <New>DocumentLibraryForm</New>
+</FormTemplates>
+</file>
+
+<file path=customXml/item2.xml><?xml version="1.0" encoding="utf-8"?>
 <p:properties xmlns:p="http://schemas.microsoft.com/office/2006/metadata/properties" xmlns:xsi="http://www.w3.org/2001/XMLSchema-instance" xmlns:pc="http://schemas.microsoft.com/office/infopath/2007/PartnerControls">
   <documentManagement/>
 </p:properties>
 </file>
 
-<file path=customXml/item2.xml><?xml version="1.0" encoding="utf-8"?>
+<file path=customXml/item3.xml><?xml version="1.0" encoding="utf-8"?>
 <ct:contentTypeSchema xmlns:ct="http://schemas.microsoft.com/office/2006/metadata/contentType" xmlns:ma="http://schemas.microsoft.com/office/2006/metadata/properties/metaAttributes" ct:_="" ma:_="" ma:contentTypeName="Документ" ma:contentTypeID="0x0101002A9C74E6E830D74E9B0FDDB4017A5417" ma:contentTypeVersion="13" ma:contentTypeDescription="Создание документа." ma:contentTypeScope="" ma:versionID="d4e423622451d608a8a05f4da7a1e1a2">
   <xsd:schema xmlns:xsd="http://www.w3.org/2001/XMLSchema" xmlns:xs="http://www.w3.org/2001/XMLSchema" xmlns:p="http://schemas.microsoft.com/office/2006/metadata/properties" xmlns:ns2="9875bd71-cde8-496c-a136-433f55d5e6d0" xmlns:ns3="e96afe77-3acb-4328-97fc-408e1bde3ecd" targetNamespace="http://schemas.microsoft.com/office/2006/metadata/properties" ma:root="true" ma:fieldsID="4831203c63c08b9f52ea6d3ee0d7a96e" ns2:_="" ns3:_="">
     <xsd:import namespace="9875bd71-cde8-496c-a136-433f55d5e6d0"/>
@@ -21339,16 +21541,15 @@
 </ct:contentTypeSchema>
 </file>
 
-<file path=customXml/item3.xml><?xml version="1.0" encoding="utf-8"?>
-<?mso-contentType ?>
-<FormTemplates xmlns="http://schemas.microsoft.com/sharepoint/v3/contenttype/forms">
-  <Display>DocumentLibraryForm</Display>
-  <Edit>DocumentLibraryForm</Edit>
-  <New>DocumentLibraryForm</New>
-</FormTemplates>
+<file path=customXml/itemProps1.xml><?xml version="1.0" encoding="utf-8"?>
+<ds:datastoreItem xmlns:ds="http://schemas.openxmlformats.org/officeDocument/2006/customXml" ds:itemID="{B34386AA-1848-4C75-B336-1053927CB025}">
+  <ds:schemaRefs>
+    <ds:schemaRef ds:uri="http://schemas.microsoft.com/sharepoint/v3/contenttype/forms"/>
+  </ds:schemaRefs>
+</ds:datastoreItem>
 </file>
 
-<file path=customXml/itemProps1.xml><?xml version="1.0" encoding="utf-8"?>
+<file path=customXml/itemProps2.xml><?xml version="1.0" encoding="utf-8"?>
 <ds:datastoreItem xmlns:ds="http://schemas.openxmlformats.org/officeDocument/2006/customXml" ds:itemID="{433DAF31-D8A6-49A0-9A5D-8B2EA5B1C511}">
   <ds:schemaRefs>
     <ds:schemaRef ds:uri="http://purl.org/dc/elements/1.1/"/>
@@ -21365,7 +21566,7 @@
 </ds:datastoreItem>
 </file>
 
-<file path=customXml/itemProps2.xml><?xml version="1.0" encoding="utf-8"?>
+<file path=customXml/itemProps3.xml><?xml version="1.0" encoding="utf-8"?>
 <ds:datastoreItem xmlns:ds="http://schemas.openxmlformats.org/officeDocument/2006/customXml" ds:itemID="{4D4651DD-DCCC-4759-B2F6-7F520BDCC2B9}">
   <ds:schemaRefs>
     <ds:schemaRef ds:uri="http://schemas.microsoft.com/office/2006/metadata/contentType"/>
@@ -21382,12 +21583,4 @@
     <ds:schemaRef ds:uri="http://schemas.microsoft.com/internal/obd"/>
   </ds:schemaRefs>
 </ds:datastoreItem>
-</file>
-
-<file path=customXml/itemProps3.xml><?xml version="1.0" encoding="utf-8"?>
-<ds:datastoreItem xmlns:ds="http://schemas.openxmlformats.org/officeDocument/2006/customXml" ds:itemID="{B34386AA-1848-4C75-B336-1053927CB025}">
-  <ds:schemaRefs>
-    <ds:schemaRef ds:uri="http://schemas.microsoft.com/sharepoint/v3/contenttype/forms"/>
-  </ds:schemaRefs>
-</ds:datastoreItem>
 </file>